--- a/outputs/deck_normalized.pptx
+++ b/outputs/deck_normalized.pptx
@@ -3113,14 +3113,7 @@
         <p:txBody>
           <a:bodyPr/>
           <a:lstStyle/>
-          <a:p>
-            <a:r>
-              <a:rPr sz="3600" b="1">
-                <a:latin typeface="Arial"/>
-              </a:rPr>
-              <a:t/>
-            </a:r>
-          </a:p>
+          <a:p/>
         </p:txBody>
       </p:sp>
       <p:sp>
@@ -3151,6 +3144,9 @@
               </a:defRPr>
             </a:pPr>
             <a:r>
+              <a:rPr b="1" sz="3600">
+                <a:latin typeface="Arial"/>
+              </a:rPr>
               <a:t>Introduction</a:t>
             </a:r>
           </a:p>
@@ -3195,8 +3191,8 @@
         </p:nvSpPr>
         <p:spPr>
           <a:xfrm>
-            <a:off x="457200" y="6217920"/>
-            <a:ext cx="8229600" cy="457200"/>
+            <a:off x="0" y="6492240"/>
+            <a:ext cx="9144000" cy="365760"/>
           </a:xfrm>
           <a:prstGeom prst="rect">
             <a:avLst/>
@@ -3209,40 +3205,9 @@
           </a:bodyPr>
           <a:lstStyle/>
           <a:p>
-            <a:pPr>
-              <a:defRPr sz="1000"/>
-            </a:pPr>
-            <a:r>
-              <a:t>Confidential — 1 of 12</a:t>
-            </a:r>
-          </a:p>
-        </p:txBody>
-      </p:sp>
-      <p:sp>
-        <p:nvSpPr>
-          <p:cNvPr id="6" name="TextBox 5"/>
-          <p:cNvSpPr txBox="1"/>
-          <p:nvPr/>
-        </p:nvSpPr>
-        <p:spPr>
-          <a:xfrm>
-            <a:off x="0" y="6477000"/>
-            <a:ext cx="9144000" cy="381000"/>
-          </a:xfrm>
-          <a:prstGeom prst="rect">
-            <a:avLst/>
-          </a:prstGeom>
-          <a:noFill/>
-        </p:spPr>
-        <p:txBody>
-          <a:bodyPr wrap="none">
-            <a:spAutoFit/>
-          </a:bodyPr>
-          <a:lstStyle/>
-          <a:p>
             <a:pPr algn="ctr"/>
             <a:r>
-              <a:rPr sz="1000">
+              <a:rPr sz="1000" b="0">
                 <a:latin typeface="Arial"/>
               </a:rPr>
               <a:t>Confidential — 1 of 12</a:t>
@@ -3282,14 +3247,7 @@
         <p:txBody>
           <a:bodyPr/>
           <a:lstStyle/>
-          <a:p>
-            <a:r>
-              <a:rPr sz="3600" b="1">
-                <a:latin typeface="Arial"/>
-              </a:rPr>
-              <a:t/>
-            </a:r>
-          </a:p>
+          <a:p/>
         </p:txBody>
       </p:sp>
       <p:sp>
@@ -3320,6 +3278,9 @@
               </a:defRPr>
             </a:pPr>
             <a:r>
+              <a:rPr b="1" sz="3600">
+                <a:latin typeface="Arial"/>
+              </a:rPr>
               <a:t>Metrics</a:t>
             </a:r>
           </a:p>
@@ -3364,8 +3325,8 @@
         </p:nvSpPr>
         <p:spPr>
           <a:xfrm>
-            <a:off x="0" y="6477000"/>
-            <a:ext cx="9144000" cy="381000"/>
+            <a:off x="0" y="6492240"/>
+            <a:ext cx="9144000" cy="365760"/>
           </a:xfrm>
           <a:prstGeom prst="rect">
             <a:avLst/>
@@ -3380,7 +3341,7 @@
           <a:p>
             <a:pPr algn="ctr"/>
             <a:r>
-              <a:rPr sz="1000">
+              <a:rPr sz="1000" b="0">
                 <a:latin typeface="Arial"/>
               </a:rPr>
               <a:t>Confidential — 10 of 12</a:t>
@@ -3420,14 +3381,7 @@
         <p:txBody>
           <a:bodyPr/>
           <a:lstStyle/>
-          <a:p>
-            <a:r>
-              <a:rPr sz="3600" b="1">
-                <a:latin typeface="Arial"/>
-              </a:rPr>
-              <a:t/>
-            </a:r>
-          </a:p>
+          <a:p/>
         </p:txBody>
       </p:sp>
       <p:sp>
@@ -3453,11 +3407,14 @@
           <a:lstStyle/>
           <a:p>
             <a:pPr>
-              <a:defRPr sz="2800" b="1">
-                <a:latin typeface="Calibri"/>
+              <a:defRPr sz="3600" b="1">
+                <a:latin typeface="Arial"/>
               </a:defRPr>
             </a:pPr>
             <a:r>
+              <a:rPr b="1" sz="3600">
+                <a:latin typeface="Arial"/>
+              </a:rPr>
               <a:t>Next Steps</a:t>
             </a:r>
           </a:p>
@@ -3502,8 +3459,8 @@
         </p:nvSpPr>
         <p:spPr>
           <a:xfrm>
-            <a:off x="0" y="6477000"/>
-            <a:ext cx="9144000" cy="381000"/>
+            <a:off x="0" y="6492240"/>
+            <a:ext cx="9144000" cy="365760"/>
           </a:xfrm>
           <a:prstGeom prst="rect">
             <a:avLst/>
@@ -3518,7 +3475,7 @@
           <a:p>
             <a:pPr algn="ctr"/>
             <a:r>
-              <a:rPr sz="1000">
+              <a:rPr sz="1000" b="0">
                 <a:latin typeface="Arial"/>
               </a:rPr>
               <a:t>Confidential — 11 of 12</a:t>
@@ -3558,14 +3515,7 @@
         <p:txBody>
           <a:bodyPr/>
           <a:lstStyle/>
-          <a:p>
-            <a:r>
-              <a:rPr sz="3600" b="1">
-                <a:latin typeface="Arial"/>
-              </a:rPr>
-              <a:t/>
-            </a:r>
-          </a:p>
+          <a:p/>
         </p:txBody>
       </p:sp>
       <p:sp>
@@ -3591,11 +3541,14 @@
           <a:lstStyle/>
           <a:p>
             <a:pPr>
-              <a:defRPr sz="4400" b="1">
+              <a:defRPr sz="3600" b="1">
                 <a:latin typeface="Arial"/>
               </a:defRPr>
             </a:pPr>
             <a:r>
+              <a:rPr b="1" sz="3600">
+                <a:latin typeface="Arial"/>
+              </a:rPr>
               <a:t>Q&amp;A</a:t>
             </a:r>
           </a:p>
@@ -3640,8 +3593,8 @@
         </p:nvSpPr>
         <p:spPr>
           <a:xfrm>
-            <a:off x="457200" y="6217920"/>
-            <a:ext cx="8229600" cy="457200"/>
+            <a:off x="0" y="6492240"/>
+            <a:ext cx="9144000" cy="365760"/>
           </a:xfrm>
           <a:prstGeom prst="rect">
             <a:avLst/>
@@ -3654,40 +3607,9 @@
           </a:bodyPr>
           <a:lstStyle/>
           <a:p>
-            <a:pPr>
-              <a:defRPr sz="1000"/>
-            </a:pPr>
-            <a:r>
-              <a:t>Confidential — 12 of 12</a:t>
-            </a:r>
-          </a:p>
-        </p:txBody>
-      </p:sp>
-      <p:sp>
-        <p:nvSpPr>
-          <p:cNvPr id="6" name="TextBox 5"/>
-          <p:cNvSpPr txBox="1"/>
-          <p:nvPr/>
-        </p:nvSpPr>
-        <p:spPr>
-          <a:xfrm>
-            <a:off x="0" y="6477000"/>
-            <a:ext cx="9144000" cy="381000"/>
-          </a:xfrm>
-          <a:prstGeom prst="rect">
-            <a:avLst/>
-          </a:prstGeom>
-          <a:noFill/>
-        </p:spPr>
-        <p:txBody>
-          <a:bodyPr wrap="none">
-            <a:spAutoFit/>
-          </a:bodyPr>
-          <a:lstStyle/>
-          <a:p>
             <a:pPr algn="ctr"/>
             <a:r>
-              <a:rPr sz="1000">
+              <a:rPr sz="1000" b="0">
                 <a:latin typeface="Arial"/>
               </a:rPr>
               <a:t>Confidential — 12 of 12</a:t>
@@ -3727,14 +3649,7 @@
         <p:txBody>
           <a:bodyPr/>
           <a:lstStyle/>
-          <a:p>
-            <a:r>
-              <a:rPr sz="3600" b="1">
-                <a:latin typeface="Arial"/>
-              </a:rPr>
-              <a:t/>
-            </a:r>
-          </a:p>
+          <a:p/>
         </p:txBody>
       </p:sp>
       <p:sp>
@@ -3760,11 +3675,14 @@
           <a:lstStyle/>
           <a:p>
             <a:pPr>
-              <a:defRPr sz="2800" b="1">
-                <a:latin typeface="Times New Roman"/>
+              <a:defRPr sz="3600" b="1">
+                <a:latin typeface="Arial"/>
               </a:defRPr>
             </a:pPr>
             <a:r>
+              <a:rPr b="1" sz="3600">
+                <a:latin typeface="Arial"/>
+              </a:rPr>
               <a:t>Overview</a:t>
             </a:r>
           </a:p>
@@ -3809,8 +3727,8 @@
         </p:nvSpPr>
         <p:spPr>
           <a:xfrm>
-            <a:off x="0" y="6477000"/>
-            <a:ext cx="9144000" cy="381000"/>
+            <a:off x="0" y="6492240"/>
+            <a:ext cx="9144000" cy="365760"/>
           </a:xfrm>
           <a:prstGeom prst="rect">
             <a:avLst/>
@@ -3825,7 +3743,7 @@
           <a:p>
             <a:pPr algn="ctr"/>
             <a:r>
-              <a:rPr sz="1000">
+              <a:rPr sz="1000" b="0">
                 <a:latin typeface="Arial"/>
               </a:rPr>
               <a:t>Confidential — 3 of 12</a:t>
@@ -3865,14 +3783,7 @@
         <p:txBody>
           <a:bodyPr/>
           <a:lstStyle/>
-          <a:p>
-            <a:r>
-              <a:rPr sz="3600" b="1">
-                <a:latin typeface="Arial"/>
-              </a:rPr>
-              <a:t/>
-            </a:r>
-          </a:p>
+          <a:p/>
         </p:txBody>
       </p:sp>
       <p:sp>
@@ -3898,11 +3809,14 @@
           <a:lstStyle/>
           <a:p>
             <a:pPr>
-              <a:defRPr sz="4400" b="1">
-                <a:latin typeface="Calibri"/>
+              <a:defRPr sz="3600" b="1">
+                <a:latin typeface="Arial"/>
               </a:defRPr>
             </a:pPr>
             <a:r>
+              <a:rPr b="1" sz="3600">
+                <a:latin typeface="Arial"/>
+              </a:rPr>
               <a:t>Problem Statement</a:t>
             </a:r>
           </a:p>
@@ -3947,8 +3861,8 @@
         </p:nvSpPr>
         <p:spPr>
           <a:xfrm>
-            <a:off x="0" y="6477000"/>
-            <a:ext cx="9144000" cy="381000"/>
+            <a:off x="0" y="6492240"/>
+            <a:ext cx="9144000" cy="365760"/>
           </a:xfrm>
           <a:prstGeom prst="rect">
             <a:avLst/>
@@ -3963,7 +3877,7 @@
           <a:p>
             <a:pPr algn="ctr"/>
             <a:r>
-              <a:rPr sz="1000">
+              <a:rPr sz="1000" b="0">
                 <a:latin typeface="Arial"/>
               </a:rPr>
               <a:t>Confidential — 4 of 12</a:t>
@@ -4003,14 +3917,7 @@
         <p:txBody>
           <a:bodyPr/>
           <a:lstStyle/>
-          <a:p>
-            <a:r>
-              <a:rPr sz="3600" b="1">
-                <a:latin typeface="Arial"/>
-              </a:rPr>
-              <a:t/>
-            </a:r>
-          </a:p>
+          <a:p/>
         </p:txBody>
       </p:sp>
       <p:sp>
@@ -4041,6 +3948,9 @@
               </a:defRPr>
             </a:pPr>
             <a:r>
+              <a:rPr b="1" sz="3600">
+                <a:latin typeface="Arial"/>
+              </a:rPr>
               <a:t>Solution</a:t>
             </a:r>
           </a:p>
@@ -4085,8 +3995,8 @@
         </p:nvSpPr>
         <p:spPr>
           <a:xfrm>
-            <a:off x="0" y="6477000"/>
-            <a:ext cx="9144000" cy="381000"/>
+            <a:off x="0" y="6492240"/>
+            <a:ext cx="9144000" cy="365760"/>
           </a:xfrm>
           <a:prstGeom prst="rect">
             <a:avLst/>
@@ -4101,7 +4011,7 @@
           <a:p>
             <a:pPr algn="ctr"/>
             <a:r>
-              <a:rPr sz="1000">
+              <a:rPr sz="1000" b="0">
                 <a:latin typeface="Arial"/>
               </a:rPr>
               <a:t>Confidential — 5 of 12</a:t>
@@ -4141,14 +4051,7 @@
         <p:txBody>
           <a:bodyPr/>
           <a:lstStyle/>
-          <a:p>
-            <a:r>
-              <a:rPr sz="3600" b="1">
-                <a:latin typeface="Arial"/>
-              </a:rPr>
-              <a:t/>
-            </a:r>
-          </a:p>
+          <a:p/>
         </p:txBody>
       </p:sp>
       <p:sp>
@@ -4174,11 +4077,14 @@
           <a:lstStyle/>
           <a:p>
             <a:pPr>
-              <a:defRPr sz="2400" b="1">
-                <a:latin typeface="Times New Roman"/>
+              <a:defRPr sz="3600" b="1">
+                <a:latin typeface="Arial"/>
               </a:defRPr>
             </a:pPr>
             <a:r>
+              <a:rPr b="1" sz="3600">
+                <a:latin typeface="Arial"/>
+              </a:rPr>
               <a:t>Architecture</a:t>
             </a:r>
           </a:p>
@@ -4223,8 +4129,8 @@
         </p:nvSpPr>
         <p:spPr>
           <a:xfrm>
-            <a:off x="457200" y="6217920"/>
-            <a:ext cx="8229600" cy="457200"/>
+            <a:off x="0" y="6492240"/>
+            <a:ext cx="9144000" cy="365760"/>
           </a:xfrm>
           <a:prstGeom prst="rect">
             <a:avLst/>
@@ -4237,40 +4143,9 @@
           </a:bodyPr>
           <a:lstStyle/>
           <a:p>
-            <a:pPr>
-              <a:defRPr sz="1000"/>
-            </a:pPr>
-            <a:r>
-              <a:t>Confidential — 5 of 12</a:t>
-            </a:r>
-          </a:p>
-        </p:txBody>
-      </p:sp>
-      <p:sp>
-        <p:nvSpPr>
-          <p:cNvPr id="6" name="TextBox 5"/>
-          <p:cNvSpPr txBox="1"/>
-          <p:nvPr/>
-        </p:nvSpPr>
-        <p:spPr>
-          <a:xfrm>
-            <a:off x="0" y="6477000"/>
-            <a:ext cx="9144000" cy="381000"/>
-          </a:xfrm>
-          <a:prstGeom prst="rect">
-            <a:avLst/>
-          </a:prstGeom>
-          <a:noFill/>
-        </p:spPr>
-        <p:txBody>
-          <a:bodyPr wrap="none">
-            <a:spAutoFit/>
-          </a:bodyPr>
-          <a:lstStyle/>
-          <a:p>
             <a:pPr algn="ctr"/>
             <a:r>
-              <a:rPr sz="1000">
+              <a:rPr sz="1000" b="0">
                 <a:latin typeface="Arial"/>
               </a:rPr>
               <a:t>Confidential — 6 of 12</a:t>
@@ -4310,14 +4185,7 @@
         <p:txBody>
           <a:bodyPr/>
           <a:lstStyle/>
-          <a:p>
-            <a:r>
-              <a:rPr sz="3600" b="1">
-                <a:latin typeface="Arial"/>
-              </a:rPr>
-              <a:t/>
-            </a:r>
-          </a:p>
+          <a:p/>
         </p:txBody>
       </p:sp>
       <p:sp>
@@ -4343,11 +4211,14 @@
           <a:lstStyle/>
           <a:p>
             <a:pPr>
-              <a:defRPr sz="4800" b="1">
+              <a:defRPr sz="3600" b="1">
                 <a:latin typeface="Arial"/>
               </a:defRPr>
             </a:pPr>
             <a:r>
+              <a:rPr b="1" sz="3600">
+                <a:latin typeface="Arial"/>
+              </a:rPr>
               <a:t>Implementation</a:t>
             </a:r>
           </a:p>
@@ -4392,8 +4263,8 @@
         </p:nvSpPr>
         <p:spPr>
           <a:xfrm>
-            <a:off x="457200" y="6217920"/>
-            <a:ext cx="8229600" cy="457200"/>
+            <a:off x="0" y="6492240"/>
+            <a:ext cx="9144000" cy="365760"/>
           </a:xfrm>
           <a:prstGeom prst="rect">
             <a:avLst/>
@@ -4406,40 +4277,9 @@
           </a:bodyPr>
           <a:lstStyle/>
           <a:p>
-            <a:pPr>
-              <a:defRPr sz="1000"/>
-            </a:pPr>
-            <a:r>
-              <a:t>Confidential — 6 of 12</a:t>
-            </a:r>
-          </a:p>
-        </p:txBody>
-      </p:sp>
-      <p:sp>
-        <p:nvSpPr>
-          <p:cNvPr id="6" name="TextBox 5"/>
-          <p:cNvSpPr txBox="1"/>
-          <p:nvPr/>
-        </p:nvSpPr>
-        <p:spPr>
-          <a:xfrm>
-            <a:off x="0" y="6477000"/>
-            <a:ext cx="9144000" cy="381000"/>
-          </a:xfrm>
-          <a:prstGeom prst="rect">
-            <a:avLst/>
-          </a:prstGeom>
-          <a:noFill/>
-        </p:spPr>
-        <p:txBody>
-          <a:bodyPr wrap="none">
-            <a:spAutoFit/>
-          </a:bodyPr>
-          <a:lstStyle/>
-          <a:p>
             <a:pPr algn="ctr"/>
             <a:r>
-              <a:rPr sz="1000">
+              <a:rPr sz="1000" b="0">
                 <a:latin typeface="Arial"/>
               </a:rPr>
               <a:t>Confidential — 7 of 12</a:t>
@@ -4479,14 +4319,7 @@
         <p:txBody>
           <a:bodyPr/>
           <a:lstStyle/>
-          <a:p>
-            <a:r>
-              <a:rPr sz="3600" b="1">
-                <a:latin typeface="Arial"/>
-              </a:rPr>
-              <a:t/>
-            </a:r>
-          </a:p>
+          <a:p/>
         </p:txBody>
       </p:sp>
       <p:sp>
@@ -4513,10 +4346,13 @@
           <a:p>
             <a:pPr>
               <a:defRPr sz="3600" b="1">
-                <a:latin typeface="Calibri"/>
+                <a:latin typeface="Arial"/>
               </a:defRPr>
             </a:pPr>
             <a:r>
+              <a:rPr b="1" sz="3600">
+                <a:latin typeface="Arial"/>
+              </a:rPr>
               <a:t>Key Features</a:t>
             </a:r>
           </a:p>
@@ -4561,8 +4397,8 @@
         </p:nvSpPr>
         <p:spPr>
           <a:xfrm>
-            <a:off x="457200" y="6217920"/>
-            <a:ext cx="8229600" cy="457200"/>
+            <a:off x="0" y="6492240"/>
+            <a:ext cx="9144000" cy="365760"/>
           </a:xfrm>
           <a:prstGeom prst="rect">
             <a:avLst/>
@@ -4575,40 +4411,9 @@
           </a:bodyPr>
           <a:lstStyle/>
           <a:p>
-            <a:pPr>
-              <a:defRPr sz="1000"/>
-            </a:pPr>
-            <a:r>
-              <a:t>Confidential — 7 of 12</a:t>
-            </a:r>
-          </a:p>
-        </p:txBody>
-      </p:sp>
-      <p:sp>
-        <p:nvSpPr>
-          <p:cNvPr id="6" name="TextBox 5"/>
-          <p:cNvSpPr txBox="1"/>
-          <p:nvPr/>
-        </p:nvSpPr>
-        <p:spPr>
-          <a:xfrm>
-            <a:off x="0" y="6477000"/>
-            <a:ext cx="9144000" cy="381000"/>
-          </a:xfrm>
-          <a:prstGeom prst="rect">
-            <a:avLst/>
-          </a:prstGeom>
-          <a:noFill/>
-        </p:spPr>
-        <p:txBody>
-          <a:bodyPr wrap="none">
-            <a:spAutoFit/>
-          </a:bodyPr>
-          <a:lstStyle/>
-          <a:p>
             <a:pPr algn="ctr"/>
             <a:r>
-              <a:rPr sz="1000">
+              <a:rPr sz="1000" b="0">
                 <a:latin typeface="Arial"/>
               </a:rPr>
               <a:t>Confidential — 2 of 12</a:t>
@@ -4648,14 +4453,7 @@
         <p:txBody>
           <a:bodyPr/>
           <a:lstStyle/>
-          <a:p>
-            <a:r>
-              <a:rPr sz="3600" b="1">
-                <a:latin typeface="Arial"/>
-              </a:rPr>
-              <a:t/>
-            </a:r>
-          </a:p>
+          <a:p/>
         </p:txBody>
       </p:sp>
       <p:sp>
@@ -4681,11 +4479,14 @@
           <a:lstStyle/>
           <a:p>
             <a:pPr>
-              <a:defRPr sz="3200" b="1">
+              <a:defRPr sz="3600" b="1">
                 <a:latin typeface="Arial"/>
               </a:defRPr>
             </a:pPr>
             <a:r>
+              <a:rPr b="1" sz="3600">
+                <a:latin typeface="Arial"/>
+              </a:rPr>
               <a:t>Demo</a:t>
             </a:r>
           </a:p>
@@ -4730,8 +4531,8 @@
         </p:nvSpPr>
         <p:spPr>
           <a:xfrm>
-            <a:off x="0" y="6477000"/>
-            <a:ext cx="9144000" cy="381000"/>
+            <a:off x="0" y="6492240"/>
+            <a:ext cx="9144000" cy="365760"/>
           </a:xfrm>
           <a:prstGeom prst="rect">
             <a:avLst/>
@@ -4746,7 +4547,7 @@
           <a:p>
             <a:pPr algn="ctr"/>
             <a:r>
-              <a:rPr sz="1000">
+              <a:rPr sz="1000" b="0">
                 <a:latin typeface="Arial"/>
               </a:rPr>
               <a:t>Confidential — 8 of 12</a:t>
@@ -4786,14 +4587,7 @@
         <p:txBody>
           <a:bodyPr/>
           <a:lstStyle/>
-          <a:p>
-            <a:r>
-              <a:rPr sz="3600" b="1">
-                <a:latin typeface="Arial"/>
-              </a:rPr>
-              <a:t/>
-            </a:r>
-          </a:p>
+          <a:p/>
         </p:txBody>
       </p:sp>
       <p:sp>
@@ -4819,11 +4613,14 @@
           <a:lstStyle/>
           <a:p>
             <a:pPr>
-              <a:defRPr sz="4000" b="1">
-                <a:latin typeface="Times New Roman"/>
+              <a:defRPr sz="3600" b="1">
+                <a:latin typeface="Arial"/>
               </a:defRPr>
             </a:pPr>
             <a:r>
+              <a:rPr b="1" sz="3600">
+                <a:latin typeface="Arial"/>
+              </a:rPr>
               <a:t>Results</a:t>
             </a:r>
           </a:p>
@@ -4868,8 +4665,8 @@
         </p:nvSpPr>
         <p:spPr>
           <a:xfrm>
-            <a:off x="0" y="6477000"/>
-            <a:ext cx="9144000" cy="381000"/>
+            <a:off x="0" y="6492240"/>
+            <a:ext cx="9144000" cy="365760"/>
           </a:xfrm>
           <a:prstGeom prst="rect">
             <a:avLst/>
@@ -4884,7 +4681,7 @@
           <a:p>
             <a:pPr algn="ctr"/>
             <a:r>
-              <a:rPr sz="1000">
+              <a:rPr sz="1000" b="0">
                 <a:latin typeface="Arial"/>
               </a:rPr>
               <a:t>Confidential — 9 of 12</a:t>
